--- a/old/2024/Predavanja/Predavanje_05_Atmosfere_u_RZ.pptx
+++ b/old/2024/Predavanja/Predavanje_05_Atmosfere_u_RZ.pptx
@@ -5,10 +5,10 @@
     <p:sldMasterId id="2147483648" r:id="rId1"/>
   </p:sldMasterIdLst>
   <p:notesMasterIdLst>
-    <p:notesMasterId r:id="rId30"/>
+    <p:notesMasterId r:id="rId29"/>
   </p:notesMasterIdLst>
   <p:handoutMasterIdLst>
-    <p:handoutMasterId r:id="rId31"/>
+    <p:handoutMasterId r:id="rId30"/>
   </p:handoutMasterIdLst>
   <p:sldIdLst>
     <p:sldId id="256" r:id="rId2"/>
@@ -26,19 +26,18 @@
     <p:sldId id="268" r:id="rId14"/>
     <p:sldId id="269" r:id="rId15"/>
     <p:sldId id="270" r:id="rId16"/>
-    <p:sldId id="271" r:id="rId17"/>
-    <p:sldId id="272" r:id="rId18"/>
-    <p:sldId id="273" r:id="rId19"/>
-    <p:sldId id="274" r:id="rId20"/>
-    <p:sldId id="275" r:id="rId21"/>
-    <p:sldId id="276" r:id="rId22"/>
-    <p:sldId id="277" r:id="rId23"/>
-    <p:sldId id="278" r:id="rId24"/>
-    <p:sldId id="279" r:id="rId25"/>
-    <p:sldId id="280" r:id="rId26"/>
-    <p:sldId id="281" r:id="rId27"/>
-    <p:sldId id="282" r:id="rId28"/>
-    <p:sldId id="283" r:id="rId29"/>
+    <p:sldId id="272" r:id="rId17"/>
+    <p:sldId id="273" r:id="rId18"/>
+    <p:sldId id="274" r:id="rId19"/>
+    <p:sldId id="275" r:id="rId20"/>
+    <p:sldId id="276" r:id="rId21"/>
+    <p:sldId id="277" r:id="rId22"/>
+    <p:sldId id="278" r:id="rId23"/>
+    <p:sldId id="279" r:id="rId24"/>
+    <p:sldId id="280" r:id="rId25"/>
+    <p:sldId id="281" r:id="rId26"/>
+    <p:sldId id="282" r:id="rId27"/>
+    <p:sldId id="283" r:id="rId28"/>
   </p:sldIdLst>
   <p:sldSz cx="10077450" cy="5668963"/>
   <p:notesSz cx="7772400" cy="10058400"/>
@@ -137,6 +136,11 @@
       </a:defRPr>
     </a:lvl9pPr>
   </p:defaultTextStyle>
+  <p:extLst>
+    <p:ext uri="{EFAFB233-063F-42B5-8137-9DF3F51BA10A}">
+      <p15:sldGuideLst xmlns:p15="http://schemas.microsoft.com/office/powerpoint/2012/main"/>
+    </p:ext>
+  </p:extLst>
 </p:presentation>
 </file>
 
@@ -1648,7 +1652,7 @@
           <p:cNvPr id="7" name="Slide Number Placeholder 6">
             <a:extLst>
               <a:ext uri="{FF2B5EF4-FFF2-40B4-BE49-F238E27FC236}">
-                <a16:creationId xmlns:a16="http://schemas.microsoft.com/office/drawing/2014/main" id="{B300C39D-A3B8-F3B2-E273-65B3A0750D5F}"/>
+                <a16:creationId xmlns:a16="http://schemas.microsoft.com/office/drawing/2014/main" id="{EAC72B48-F4F6-4B46-026E-649B999E3617}"/>
               </a:ext>
             </a:extLst>
           </p:cNvPr>
@@ -1669,7 +1673,7 @@
           <a:lstStyle/>
           <a:p>
             <a:pPr lvl="0"/>
-            <a:fld id="{696E925E-CEC1-40B0-B26E-2405EAA1C344}" type="slidenum">
+            <a:fld id="{17FB81D9-9133-4471-93AA-6652BC159E03}" type="slidenum">
               <a:t>16</a:t>
             </a:fld>
             <a:endParaRPr lang="en-US"/>
@@ -1681,7 +1685,7 @@
           <p:cNvPr id="2" name="Slide Image Placeholder 1">
             <a:extLst>
               <a:ext uri="{FF2B5EF4-FFF2-40B4-BE49-F238E27FC236}">
-                <a16:creationId xmlns:a16="http://schemas.microsoft.com/office/drawing/2014/main" id="{E20F925F-4F57-72F0-12BA-F9D05ED4CE4D}"/>
+                <a16:creationId xmlns:a16="http://schemas.microsoft.com/office/drawing/2014/main" id="{2DB5E11B-A0FE-BF5B-59E4-348671DA19E8}"/>
               </a:ext>
             </a:extLst>
           </p:cNvPr>
@@ -1713,7 +1717,7 @@
           <p:cNvPr id="3" name="Notes Placeholder 2">
             <a:extLst>
               <a:ext uri="{FF2B5EF4-FFF2-40B4-BE49-F238E27FC236}">
-                <a16:creationId xmlns:a16="http://schemas.microsoft.com/office/drawing/2014/main" id="{EEBE2398-3A0C-55BE-918F-A446DC259A92}"/>
+                <a16:creationId xmlns:a16="http://schemas.microsoft.com/office/drawing/2014/main" id="{C6D20DB1-1D78-2AFA-90B4-EEAAA4D4EE8B}"/>
               </a:ext>
             </a:extLst>
           </p:cNvPr>
@@ -1763,7 +1767,7 @@
           <p:cNvPr id="7" name="Slide Number Placeholder 6">
             <a:extLst>
               <a:ext uri="{FF2B5EF4-FFF2-40B4-BE49-F238E27FC236}">
-                <a16:creationId xmlns:a16="http://schemas.microsoft.com/office/drawing/2014/main" id="{EAC72B48-F4F6-4B46-026E-649B999E3617}"/>
+                <a16:creationId xmlns:a16="http://schemas.microsoft.com/office/drawing/2014/main" id="{EEA3030C-927F-851C-E525-362FB2765F9B}"/>
               </a:ext>
             </a:extLst>
           </p:cNvPr>
@@ -1784,7 +1788,7 @@
           <a:lstStyle/>
           <a:p>
             <a:pPr lvl="0"/>
-            <a:fld id="{17FB81D9-9133-4471-93AA-6652BC159E03}" type="slidenum">
+            <a:fld id="{DAE28F7E-3083-4D18-9E81-880B6F6236C2}" type="slidenum">
               <a:t>17</a:t>
             </a:fld>
             <a:endParaRPr lang="en-US"/>
@@ -1796,7 +1800,7 @@
           <p:cNvPr id="2" name="Slide Image Placeholder 1">
             <a:extLst>
               <a:ext uri="{FF2B5EF4-FFF2-40B4-BE49-F238E27FC236}">
-                <a16:creationId xmlns:a16="http://schemas.microsoft.com/office/drawing/2014/main" id="{2DB5E11B-A0FE-BF5B-59E4-348671DA19E8}"/>
+                <a16:creationId xmlns:a16="http://schemas.microsoft.com/office/drawing/2014/main" id="{309194B4-3A5A-F4B0-8DB0-7860B842E91A}"/>
               </a:ext>
             </a:extLst>
           </p:cNvPr>
@@ -1828,7 +1832,7 @@
           <p:cNvPr id="3" name="Notes Placeholder 2">
             <a:extLst>
               <a:ext uri="{FF2B5EF4-FFF2-40B4-BE49-F238E27FC236}">
-                <a16:creationId xmlns:a16="http://schemas.microsoft.com/office/drawing/2014/main" id="{C6D20DB1-1D78-2AFA-90B4-EEAAA4D4EE8B}"/>
+                <a16:creationId xmlns:a16="http://schemas.microsoft.com/office/drawing/2014/main" id="{ABB24BA3-F1BB-B35F-021A-235AA7228050}"/>
               </a:ext>
             </a:extLst>
           </p:cNvPr>
@@ -1878,7 +1882,7 @@
           <p:cNvPr id="7" name="Slide Number Placeholder 6">
             <a:extLst>
               <a:ext uri="{FF2B5EF4-FFF2-40B4-BE49-F238E27FC236}">
-                <a16:creationId xmlns:a16="http://schemas.microsoft.com/office/drawing/2014/main" id="{EEA3030C-927F-851C-E525-362FB2765F9B}"/>
+                <a16:creationId xmlns:a16="http://schemas.microsoft.com/office/drawing/2014/main" id="{0F1564F4-48F6-6051-02D2-D5CB709B1732}"/>
               </a:ext>
             </a:extLst>
           </p:cNvPr>
@@ -1899,7 +1903,7 @@
           <a:lstStyle/>
           <a:p>
             <a:pPr lvl="0"/>
-            <a:fld id="{DAE28F7E-3083-4D18-9E81-880B6F6236C2}" type="slidenum">
+            <a:fld id="{90117899-C474-4261-B04E-F0BE3BBDFBD4}" type="slidenum">
               <a:t>18</a:t>
             </a:fld>
             <a:endParaRPr lang="en-US"/>
@@ -1911,7 +1915,7 @@
           <p:cNvPr id="2" name="Slide Image Placeholder 1">
             <a:extLst>
               <a:ext uri="{FF2B5EF4-FFF2-40B4-BE49-F238E27FC236}">
-                <a16:creationId xmlns:a16="http://schemas.microsoft.com/office/drawing/2014/main" id="{309194B4-3A5A-F4B0-8DB0-7860B842E91A}"/>
+                <a16:creationId xmlns:a16="http://schemas.microsoft.com/office/drawing/2014/main" id="{C33BF3DB-C9DE-DF6D-BA32-A1D774995434}"/>
               </a:ext>
             </a:extLst>
           </p:cNvPr>
@@ -1943,7 +1947,7 @@
           <p:cNvPr id="3" name="Notes Placeholder 2">
             <a:extLst>
               <a:ext uri="{FF2B5EF4-FFF2-40B4-BE49-F238E27FC236}">
-                <a16:creationId xmlns:a16="http://schemas.microsoft.com/office/drawing/2014/main" id="{ABB24BA3-F1BB-B35F-021A-235AA7228050}"/>
+                <a16:creationId xmlns:a16="http://schemas.microsoft.com/office/drawing/2014/main" id="{AD8E8FA0-A6DA-17C1-1033-51DBAE60EDEB}"/>
               </a:ext>
             </a:extLst>
           </p:cNvPr>
@@ -1993,7 +1997,7 @@
           <p:cNvPr id="7" name="Slide Number Placeholder 6">
             <a:extLst>
               <a:ext uri="{FF2B5EF4-FFF2-40B4-BE49-F238E27FC236}">
-                <a16:creationId xmlns:a16="http://schemas.microsoft.com/office/drawing/2014/main" id="{0F1564F4-48F6-6051-02D2-D5CB709B1732}"/>
+                <a16:creationId xmlns:a16="http://schemas.microsoft.com/office/drawing/2014/main" id="{18C124B0-C6A0-E4E7-71A5-D5533EB7EF0C}"/>
               </a:ext>
             </a:extLst>
           </p:cNvPr>
@@ -2014,7 +2018,7 @@
           <a:lstStyle/>
           <a:p>
             <a:pPr lvl="0"/>
-            <a:fld id="{90117899-C474-4261-B04E-F0BE3BBDFBD4}" type="slidenum">
+            <a:fld id="{43D375A2-3582-4BAF-A75B-41C4E4054E4C}" type="slidenum">
               <a:t>19</a:t>
             </a:fld>
             <a:endParaRPr lang="en-US"/>
@@ -2026,7 +2030,7 @@
           <p:cNvPr id="2" name="Slide Image Placeholder 1">
             <a:extLst>
               <a:ext uri="{FF2B5EF4-FFF2-40B4-BE49-F238E27FC236}">
-                <a16:creationId xmlns:a16="http://schemas.microsoft.com/office/drawing/2014/main" id="{C33BF3DB-C9DE-DF6D-BA32-A1D774995434}"/>
+                <a16:creationId xmlns:a16="http://schemas.microsoft.com/office/drawing/2014/main" id="{267AA2C1-C8D0-A437-AE32-D2172F2D8663}"/>
               </a:ext>
             </a:extLst>
           </p:cNvPr>
@@ -2058,7 +2062,7 @@
           <p:cNvPr id="3" name="Notes Placeholder 2">
             <a:extLst>
               <a:ext uri="{FF2B5EF4-FFF2-40B4-BE49-F238E27FC236}">
-                <a16:creationId xmlns:a16="http://schemas.microsoft.com/office/drawing/2014/main" id="{AD8E8FA0-A6DA-17C1-1033-51DBAE60EDEB}"/>
+                <a16:creationId xmlns:a16="http://schemas.microsoft.com/office/drawing/2014/main" id="{0D1329B2-DF7D-5F0F-E40F-789BC81C2BB9}"/>
               </a:ext>
             </a:extLst>
           </p:cNvPr>
@@ -2225,7 +2229,7 @@
           <p:cNvPr id="7" name="Slide Number Placeholder 6">
             <a:extLst>
               <a:ext uri="{FF2B5EF4-FFF2-40B4-BE49-F238E27FC236}">
-                <a16:creationId xmlns:a16="http://schemas.microsoft.com/office/drawing/2014/main" id="{18C124B0-C6A0-E4E7-71A5-D5533EB7EF0C}"/>
+                <a16:creationId xmlns:a16="http://schemas.microsoft.com/office/drawing/2014/main" id="{04A3DF20-5053-F4F6-6BA7-75D5F3920793}"/>
               </a:ext>
             </a:extLst>
           </p:cNvPr>
@@ -2246,7 +2250,7 @@
           <a:lstStyle/>
           <a:p>
             <a:pPr lvl="0"/>
-            <a:fld id="{43D375A2-3582-4BAF-A75B-41C4E4054E4C}" type="slidenum">
+            <a:fld id="{FBE0003F-62A3-47F7-AF61-AAF410187CB6}" type="slidenum">
               <a:t>20</a:t>
             </a:fld>
             <a:endParaRPr lang="en-US"/>
@@ -2258,7 +2262,7 @@
           <p:cNvPr id="2" name="Slide Image Placeholder 1">
             <a:extLst>
               <a:ext uri="{FF2B5EF4-FFF2-40B4-BE49-F238E27FC236}">
-                <a16:creationId xmlns:a16="http://schemas.microsoft.com/office/drawing/2014/main" id="{267AA2C1-C8D0-A437-AE32-D2172F2D8663}"/>
+                <a16:creationId xmlns:a16="http://schemas.microsoft.com/office/drawing/2014/main" id="{AEB62238-A629-133E-067E-2F33433140D7}"/>
               </a:ext>
             </a:extLst>
           </p:cNvPr>
@@ -2290,7 +2294,7 @@
           <p:cNvPr id="3" name="Notes Placeholder 2">
             <a:extLst>
               <a:ext uri="{FF2B5EF4-FFF2-40B4-BE49-F238E27FC236}">
-                <a16:creationId xmlns:a16="http://schemas.microsoft.com/office/drawing/2014/main" id="{0D1329B2-DF7D-5F0F-E40F-789BC81C2BB9}"/>
+                <a16:creationId xmlns:a16="http://schemas.microsoft.com/office/drawing/2014/main" id="{67253299-B728-FE3A-68A1-40C9D3DD6BA6}"/>
               </a:ext>
             </a:extLst>
           </p:cNvPr>
@@ -2340,7 +2344,7 @@
           <p:cNvPr id="7" name="Slide Number Placeholder 6">
             <a:extLst>
               <a:ext uri="{FF2B5EF4-FFF2-40B4-BE49-F238E27FC236}">
-                <a16:creationId xmlns:a16="http://schemas.microsoft.com/office/drawing/2014/main" id="{04A3DF20-5053-F4F6-6BA7-75D5F3920793}"/>
+                <a16:creationId xmlns:a16="http://schemas.microsoft.com/office/drawing/2014/main" id="{41664DA6-6355-0CEE-DA56-9D71B0183E23}"/>
               </a:ext>
             </a:extLst>
           </p:cNvPr>
@@ -2361,7 +2365,7 @@
           <a:lstStyle/>
           <a:p>
             <a:pPr lvl="0"/>
-            <a:fld id="{FBE0003F-62A3-47F7-AF61-AAF410187CB6}" type="slidenum">
+            <a:fld id="{6AB26068-C03D-4EAA-9A5C-7577DCA6F6AA}" type="slidenum">
               <a:t>21</a:t>
             </a:fld>
             <a:endParaRPr lang="en-US"/>
@@ -2373,7 +2377,7 @@
           <p:cNvPr id="2" name="Slide Image Placeholder 1">
             <a:extLst>
               <a:ext uri="{FF2B5EF4-FFF2-40B4-BE49-F238E27FC236}">
-                <a16:creationId xmlns:a16="http://schemas.microsoft.com/office/drawing/2014/main" id="{AEB62238-A629-133E-067E-2F33433140D7}"/>
+                <a16:creationId xmlns:a16="http://schemas.microsoft.com/office/drawing/2014/main" id="{EE387F3A-B5B3-94BC-AB2D-CE44248D0A8F}"/>
               </a:ext>
             </a:extLst>
           </p:cNvPr>
@@ -2405,7 +2409,7 @@
           <p:cNvPr id="3" name="Notes Placeholder 2">
             <a:extLst>
               <a:ext uri="{FF2B5EF4-FFF2-40B4-BE49-F238E27FC236}">
-                <a16:creationId xmlns:a16="http://schemas.microsoft.com/office/drawing/2014/main" id="{67253299-B728-FE3A-68A1-40C9D3DD6BA6}"/>
+                <a16:creationId xmlns:a16="http://schemas.microsoft.com/office/drawing/2014/main" id="{73E24C92-91D6-B466-C7E8-B6ACC61BB5EC}"/>
               </a:ext>
             </a:extLst>
           </p:cNvPr>
@@ -2455,7 +2459,7 @@
           <p:cNvPr id="7" name="Slide Number Placeholder 6">
             <a:extLst>
               <a:ext uri="{FF2B5EF4-FFF2-40B4-BE49-F238E27FC236}">
-                <a16:creationId xmlns:a16="http://schemas.microsoft.com/office/drawing/2014/main" id="{41664DA6-6355-0CEE-DA56-9D71B0183E23}"/>
+                <a16:creationId xmlns:a16="http://schemas.microsoft.com/office/drawing/2014/main" id="{31AB4E40-A88D-7D89-C993-A0941B6B269B}"/>
               </a:ext>
             </a:extLst>
           </p:cNvPr>
@@ -2476,7 +2480,7 @@
           <a:lstStyle/>
           <a:p>
             <a:pPr lvl="0"/>
-            <a:fld id="{6AB26068-C03D-4EAA-9A5C-7577DCA6F6AA}" type="slidenum">
+            <a:fld id="{00151A99-D222-4F08-AAF9-64CA99AB3213}" type="slidenum">
               <a:t>22</a:t>
             </a:fld>
             <a:endParaRPr lang="en-US"/>
@@ -2488,7 +2492,7 @@
           <p:cNvPr id="2" name="Slide Image Placeholder 1">
             <a:extLst>
               <a:ext uri="{FF2B5EF4-FFF2-40B4-BE49-F238E27FC236}">
-                <a16:creationId xmlns:a16="http://schemas.microsoft.com/office/drawing/2014/main" id="{EE387F3A-B5B3-94BC-AB2D-CE44248D0A8F}"/>
+                <a16:creationId xmlns:a16="http://schemas.microsoft.com/office/drawing/2014/main" id="{F610AA8D-C5AB-BB50-7689-481DF5C14E32}"/>
               </a:ext>
             </a:extLst>
           </p:cNvPr>
@@ -2520,7 +2524,7 @@
           <p:cNvPr id="3" name="Notes Placeholder 2">
             <a:extLst>
               <a:ext uri="{FF2B5EF4-FFF2-40B4-BE49-F238E27FC236}">
-                <a16:creationId xmlns:a16="http://schemas.microsoft.com/office/drawing/2014/main" id="{73E24C92-91D6-B466-C7E8-B6ACC61BB5EC}"/>
+                <a16:creationId xmlns:a16="http://schemas.microsoft.com/office/drawing/2014/main" id="{519DFD54-561C-71A9-F9B3-9CA965997FE2}"/>
               </a:ext>
             </a:extLst>
           </p:cNvPr>
@@ -2570,7 +2574,7 @@
           <p:cNvPr id="7" name="Slide Number Placeholder 6">
             <a:extLst>
               <a:ext uri="{FF2B5EF4-FFF2-40B4-BE49-F238E27FC236}">
-                <a16:creationId xmlns:a16="http://schemas.microsoft.com/office/drawing/2014/main" id="{31AB4E40-A88D-7D89-C993-A0941B6B269B}"/>
+                <a16:creationId xmlns:a16="http://schemas.microsoft.com/office/drawing/2014/main" id="{6A1AECC9-982A-BC2B-0F33-76940CAEB058}"/>
               </a:ext>
             </a:extLst>
           </p:cNvPr>
@@ -2591,7 +2595,7 @@
           <a:lstStyle/>
           <a:p>
             <a:pPr lvl="0"/>
-            <a:fld id="{00151A99-D222-4F08-AAF9-64CA99AB3213}" type="slidenum">
+            <a:fld id="{217E0E4B-0A1D-4873-90EF-D5C62163E883}" type="slidenum">
               <a:t>23</a:t>
             </a:fld>
             <a:endParaRPr lang="en-US"/>
@@ -2603,7 +2607,7 @@
           <p:cNvPr id="2" name="Slide Image Placeholder 1">
             <a:extLst>
               <a:ext uri="{FF2B5EF4-FFF2-40B4-BE49-F238E27FC236}">
-                <a16:creationId xmlns:a16="http://schemas.microsoft.com/office/drawing/2014/main" id="{F610AA8D-C5AB-BB50-7689-481DF5C14E32}"/>
+                <a16:creationId xmlns:a16="http://schemas.microsoft.com/office/drawing/2014/main" id="{342C062E-D250-64C9-9764-3E35DC4758F9}"/>
               </a:ext>
             </a:extLst>
           </p:cNvPr>
@@ -2635,7 +2639,7 @@
           <p:cNvPr id="3" name="Notes Placeholder 2">
             <a:extLst>
               <a:ext uri="{FF2B5EF4-FFF2-40B4-BE49-F238E27FC236}">
-                <a16:creationId xmlns:a16="http://schemas.microsoft.com/office/drawing/2014/main" id="{519DFD54-561C-71A9-F9B3-9CA965997FE2}"/>
+                <a16:creationId xmlns:a16="http://schemas.microsoft.com/office/drawing/2014/main" id="{99C9BCEE-0BD1-DBEA-391D-E1C52059AC64}"/>
               </a:ext>
             </a:extLst>
           </p:cNvPr>
@@ -2685,7 +2689,7 @@
           <p:cNvPr id="7" name="Slide Number Placeholder 6">
             <a:extLst>
               <a:ext uri="{FF2B5EF4-FFF2-40B4-BE49-F238E27FC236}">
-                <a16:creationId xmlns:a16="http://schemas.microsoft.com/office/drawing/2014/main" id="{6A1AECC9-982A-BC2B-0F33-76940CAEB058}"/>
+                <a16:creationId xmlns:a16="http://schemas.microsoft.com/office/drawing/2014/main" id="{20CE9F45-1E6F-FE98-C354-863DEA4022A5}"/>
               </a:ext>
             </a:extLst>
           </p:cNvPr>
@@ -2706,7 +2710,7 @@
           <a:lstStyle/>
           <a:p>
             <a:pPr lvl="0"/>
-            <a:fld id="{217E0E4B-0A1D-4873-90EF-D5C62163E883}" type="slidenum">
+            <a:fld id="{17961E0E-E5D1-4F92-801E-950EF890FDC2}" type="slidenum">
               <a:t>24</a:t>
             </a:fld>
             <a:endParaRPr lang="en-US"/>
@@ -2718,7 +2722,7 @@
           <p:cNvPr id="2" name="Slide Image Placeholder 1">
             <a:extLst>
               <a:ext uri="{FF2B5EF4-FFF2-40B4-BE49-F238E27FC236}">
-                <a16:creationId xmlns:a16="http://schemas.microsoft.com/office/drawing/2014/main" id="{342C062E-D250-64C9-9764-3E35DC4758F9}"/>
+                <a16:creationId xmlns:a16="http://schemas.microsoft.com/office/drawing/2014/main" id="{3EAF6334-EA8F-09AC-5565-90DF25E55588}"/>
               </a:ext>
             </a:extLst>
           </p:cNvPr>
@@ -2750,7 +2754,7 @@
           <p:cNvPr id="3" name="Notes Placeholder 2">
             <a:extLst>
               <a:ext uri="{FF2B5EF4-FFF2-40B4-BE49-F238E27FC236}">
-                <a16:creationId xmlns:a16="http://schemas.microsoft.com/office/drawing/2014/main" id="{99C9BCEE-0BD1-DBEA-391D-E1C52059AC64}"/>
+                <a16:creationId xmlns:a16="http://schemas.microsoft.com/office/drawing/2014/main" id="{D479225B-E8F8-F3AE-9BA2-9DC3C7094DB0}"/>
               </a:ext>
             </a:extLst>
           </p:cNvPr>
@@ -2800,7 +2804,7 @@
           <p:cNvPr id="7" name="Slide Number Placeholder 6">
             <a:extLst>
               <a:ext uri="{FF2B5EF4-FFF2-40B4-BE49-F238E27FC236}">
-                <a16:creationId xmlns:a16="http://schemas.microsoft.com/office/drawing/2014/main" id="{20CE9F45-1E6F-FE98-C354-863DEA4022A5}"/>
+                <a16:creationId xmlns:a16="http://schemas.microsoft.com/office/drawing/2014/main" id="{A38C1ED4-1762-015C-190B-EF78699AD196}"/>
               </a:ext>
             </a:extLst>
           </p:cNvPr>
@@ -2821,7 +2825,7 @@
           <a:lstStyle/>
           <a:p>
             <a:pPr lvl="0"/>
-            <a:fld id="{17961E0E-E5D1-4F92-801E-950EF890FDC2}" type="slidenum">
+            <a:fld id="{0FCA08E2-2B87-4214-B854-A17E37CC178E}" type="slidenum">
               <a:t>25</a:t>
             </a:fld>
             <a:endParaRPr lang="en-US"/>
@@ -2833,7 +2837,7 @@
           <p:cNvPr id="2" name="Slide Image Placeholder 1">
             <a:extLst>
               <a:ext uri="{FF2B5EF4-FFF2-40B4-BE49-F238E27FC236}">
-                <a16:creationId xmlns:a16="http://schemas.microsoft.com/office/drawing/2014/main" id="{3EAF6334-EA8F-09AC-5565-90DF25E55588}"/>
+                <a16:creationId xmlns:a16="http://schemas.microsoft.com/office/drawing/2014/main" id="{032914BA-732F-F7FD-F7B0-3CD0CE14FDD1}"/>
               </a:ext>
             </a:extLst>
           </p:cNvPr>
@@ -2865,7 +2869,7 @@
           <p:cNvPr id="3" name="Notes Placeholder 2">
             <a:extLst>
               <a:ext uri="{FF2B5EF4-FFF2-40B4-BE49-F238E27FC236}">
-                <a16:creationId xmlns:a16="http://schemas.microsoft.com/office/drawing/2014/main" id="{D479225B-E8F8-F3AE-9BA2-9DC3C7094DB0}"/>
+                <a16:creationId xmlns:a16="http://schemas.microsoft.com/office/drawing/2014/main" id="{7F6FDD03-9B04-D3A6-5B91-86D01973EB65}"/>
               </a:ext>
             </a:extLst>
           </p:cNvPr>
@@ -2915,7 +2919,7 @@
           <p:cNvPr id="7" name="Slide Number Placeholder 6">
             <a:extLst>
               <a:ext uri="{FF2B5EF4-FFF2-40B4-BE49-F238E27FC236}">
-                <a16:creationId xmlns:a16="http://schemas.microsoft.com/office/drawing/2014/main" id="{A38C1ED4-1762-015C-190B-EF78699AD196}"/>
+                <a16:creationId xmlns:a16="http://schemas.microsoft.com/office/drawing/2014/main" id="{67771BE3-B1DC-A96C-14F5-004E024FD8BB}"/>
               </a:ext>
             </a:extLst>
           </p:cNvPr>
@@ -2936,7 +2940,7 @@
           <a:lstStyle/>
           <a:p>
             <a:pPr lvl="0"/>
-            <a:fld id="{0FCA08E2-2B87-4214-B854-A17E37CC178E}" type="slidenum">
+            <a:fld id="{124110C3-1EA5-438E-928B-7F49A7C525FC}" type="slidenum">
               <a:t>26</a:t>
             </a:fld>
             <a:endParaRPr lang="en-US"/>
@@ -2948,7 +2952,7 @@
           <p:cNvPr id="2" name="Slide Image Placeholder 1">
             <a:extLst>
               <a:ext uri="{FF2B5EF4-FFF2-40B4-BE49-F238E27FC236}">
-                <a16:creationId xmlns:a16="http://schemas.microsoft.com/office/drawing/2014/main" id="{032914BA-732F-F7FD-F7B0-3CD0CE14FDD1}"/>
+                <a16:creationId xmlns:a16="http://schemas.microsoft.com/office/drawing/2014/main" id="{21F74419-3B14-6BF1-CB2B-C6405DEAC023}"/>
               </a:ext>
             </a:extLst>
           </p:cNvPr>
@@ -2980,7 +2984,7 @@
           <p:cNvPr id="3" name="Notes Placeholder 2">
             <a:extLst>
               <a:ext uri="{FF2B5EF4-FFF2-40B4-BE49-F238E27FC236}">
-                <a16:creationId xmlns:a16="http://schemas.microsoft.com/office/drawing/2014/main" id="{7F6FDD03-9B04-D3A6-5B91-86D01973EB65}"/>
+                <a16:creationId xmlns:a16="http://schemas.microsoft.com/office/drawing/2014/main" id="{010FFABD-2C0C-092C-8D26-E5CA0E423B64}"/>
               </a:ext>
             </a:extLst>
           </p:cNvPr>
@@ -3030,7 +3034,7 @@
           <p:cNvPr id="7" name="Slide Number Placeholder 6">
             <a:extLst>
               <a:ext uri="{FF2B5EF4-FFF2-40B4-BE49-F238E27FC236}">
-                <a16:creationId xmlns:a16="http://schemas.microsoft.com/office/drawing/2014/main" id="{67771BE3-B1DC-A96C-14F5-004E024FD8BB}"/>
+                <a16:creationId xmlns:a16="http://schemas.microsoft.com/office/drawing/2014/main" id="{A6C82190-4791-450F-7CBF-5F50C251B7F4}"/>
               </a:ext>
             </a:extLst>
           </p:cNvPr>
@@ -3051,123 +3055,8 @@
           <a:lstStyle/>
           <a:p>
             <a:pPr lvl="0"/>
-            <a:fld id="{124110C3-1EA5-438E-928B-7F49A7C525FC}" type="slidenum">
+            <a:fld id="{C9464EC7-A57F-4188-9B81-109C86E4A612}" type="slidenum">
               <a:t>27</a:t>
-            </a:fld>
-            <a:endParaRPr lang="en-US"/>
-          </a:p>
-        </p:txBody>
-      </p:sp>
-      <p:sp>
-        <p:nvSpPr>
-          <p:cNvPr id="2" name="Slide Image Placeholder 1">
-            <a:extLst>
-              <a:ext uri="{FF2B5EF4-FFF2-40B4-BE49-F238E27FC236}">
-                <a16:creationId xmlns:a16="http://schemas.microsoft.com/office/drawing/2014/main" id="{21F74419-3B14-6BF1-CB2B-C6405DEAC023}"/>
-              </a:ext>
-            </a:extLst>
-          </p:cNvPr>
-          <p:cNvSpPr>
-            <a:spLocks noGrp="1" noRot="1" noChangeAspect="1" noResize="1"/>
-          </p:cNvSpPr>
-          <p:nvPr>
-            <p:ph type="sldImg"/>
-          </p:nvPr>
-        </p:nvSpPr>
-        <p:spPr>
-          <a:xfrm>
-            <a:off x="533400" y="763588"/>
-            <a:ext cx="6704013" cy="3771900"/>
-          </a:xfrm>
-          <a:solidFill>
-            <a:srgbClr val="729FCF"/>
-          </a:solidFill>
-          <a:ln w="25400">
-            <a:solidFill>
-              <a:srgbClr val="3465A4"/>
-            </a:solidFill>
-            <a:prstDash val="solid"/>
-          </a:ln>
-        </p:spPr>
-      </p:sp>
-      <p:sp>
-        <p:nvSpPr>
-          <p:cNvPr id="3" name="Notes Placeholder 2">
-            <a:extLst>
-              <a:ext uri="{FF2B5EF4-FFF2-40B4-BE49-F238E27FC236}">
-                <a16:creationId xmlns:a16="http://schemas.microsoft.com/office/drawing/2014/main" id="{010FFABD-2C0C-092C-8D26-E5CA0E423B64}"/>
-              </a:ext>
-            </a:extLst>
-          </p:cNvPr>
-          <p:cNvSpPr txBox="1">
-            <a:spLocks noGrp="1"/>
-          </p:cNvSpPr>
-          <p:nvPr>
-            <p:ph type="body" sz="quarter" idx="1"/>
-          </p:nvPr>
-        </p:nvSpPr>
-        <p:spPr/>
-        <p:txBody>
-          <a:bodyPr vert="horz"/>
-          <a:lstStyle/>
-          <a:p>
-            <a:endParaRPr lang="en-US"/>
-          </a:p>
-        </p:txBody>
-      </p:sp>
-    </p:spTree>
-  </p:cSld>
-  <p:clrMapOvr>
-    <a:masterClrMapping/>
-  </p:clrMapOvr>
-</p:notes>
-</file>
-
-<file path=ppt/notesSlides/notesSlide28.xml><?xml version="1.0" encoding="utf-8"?>
-<p:notes xmlns:a="http://schemas.openxmlformats.org/drawingml/2006/main" xmlns:r="http://schemas.openxmlformats.org/officeDocument/2006/relationships" xmlns:p="http://schemas.openxmlformats.org/presentationml/2006/main">
-  <p:cSld>
-    <p:spTree>
-      <p:nvGrpSpPr>
-        <p:cNvPr id="1" name=""/>
-        <p:cNvGrpSpPr/>
-        <p:nvPr/>
-      </p:nvGrpSpPr>
-      <p:grpSpPr>
-        <a:xfrm>
-          <a:off x="0" y="0"/>
-          <a:ext cx="0" cy="0"/>
-          <a:chOff x="0" y="0"/>
-          <a:chExt cx="0" cy="0"/>
-        </a:xfrm>
-      </p:grpSpPr>
-      <p:sp>
-        <p:nvSpPr>
-          <p:cNvPr id="7" name="Slide Number Placeholder 6">
-            <a:extLst>
-              <a:ext uri="{FF2B5EF4-FFF2-40B4-BE49-F238E27FC236}">
-                <a16:creationId xmlns:a16="http://schemas.microsoft.com/office/drawing/2014/main" id="{A6C82190-4791-450F-7CBF-5F50C251B7F4}"/>
-              </a:ext>
-            </a:extLst>
-          </p:cNvPr>
-          <p:cNvSpPr txBox="1">
-            <a:spLocks noGrp="1"/>
-          </p:cNvSpPr>
-          <p:nvPr>
-            <p:ph type="sldNum" sz="quarter" idx="5"/>
-          </p:nvPr>
-        </p:nvSpPr>
-        <p:spPr>
-          <a:ln/>
-        </p:spPr>
-        <p:txBody>
-          <a:bodyPr vert="horz" lIns="0" tIns="0" rIns="0" bIns="0" anchor="b" anchorCtr="0">
-            <a:noAutofit/>
-          </a:bodyPr>
-          <a:lstStyle/>
-          <a:p>
-            <a:pPr lvl="0"/>
-            <a:fld id="{C9464EC7-A57F-4188-9B81-109C86E4A612}" type="slidenum">
-              <a:t>28</a:t>
             </a:fld>
             <a:endParaRPr lang="en-US"/>
           </a:p>
@@ -7315,7 +7204,7 @@
       </p:grpSpPr>
       <p:pic>
         <p:nvPicPr>
-          <p:cNvPr id="2" name="">
+          <p:cNvPr id="2" name="Picture 1">
             <a:extLst>
               <a:ext uri="{FF2B5EF4-FFF2-40B4-BE49-F238E27FC236}">
                 <a16:creationId xmlns:a16="http://schemas.microsoft.com/office/drawing/2014/main" id="{50C5ADD5-7B32-9A90-71D0-3167F9295CC5}"/>
@@ -7763,7 +7652,7 @@
       </p:sp>
       <p:pic>
         <p:nvPicPr>
-          <p:cNvPr id="6" name="">
+          <p:cNvPr id="6" name="Picture 5">
             <a:extLst>
               <a:ext uri="{FF2B5EF4-FFF2-40B4-BE49-F238E27FC236}">
                 <a16:creationId xmlns:a16="http://schemas.microsoft.com/office/drawing/2014/main" id="{340F8568-11F4-AF2D-B306-EA9A62763C1F}"/>
@@ -7801,7 +7690,7 @@
       </p:pic>
       <p:pic>
         <p:nvPicPr>
-          <p:cNvPr id="7" name="">
+          <p:cNvPr id="7" name="Picture 6">
             <a:extLst>
               <a:ext uri="{FF2B5EF4-FFF2-40B4-BE49-F238E27FC236}">
                 <a16:creationId xmlns:a16="http://schemas.microsoft.com/office/drawing/2014/main" id="{26E7BFD4-1308-77F1-FA61-4B7B234F834B}"/>
@@ -8723,7 +8612,7 @@
       </p:sp>
       <p:pic>
         <p:nvPicPr>
-          <p:cNvPr id="4" name="">
+          <p:cNvPr id="4" name="Picture 3">
             <a:extLst>
               <a:ext uri="{FF2B5EF4-FFF2-40B4-BE49-F238E27FC236}">
                 <a16:creationId xmlns:a16="http://schemas.microsoft.com/office/drawing/2014/main" id="{18E7DF25-31CF-A140-D0B0-4AE1678C35CA}"/>
@@ -9398,7 +9287,7 @@
       </p:sp>
       <p:pic>
         <p:nvPicPr>
-          <p:cNvPr id="4" name="">
+          <p:cNvPr id="4" name="Picture 3">
             <a:extLst>
               <a:ext uri="{FF2B5EF4-FFF2-40B4-BE49-F238E27FC236}">
                 <a16:creationId xmlns:a16="http://schemas.microsoft.com/office/drawing/2014/main" id="{36623176-46C6-1E5A-E8A3-93C03E19EF4D}"/>
@@ -9495,7 +9384,7 @@
       </p:sp>
       <p:pic>
         <p:nvPicPr>
-          <p:cNvPr id="3" name="">
+          <p:cNvPr id="3" name="Picture 2">
             <a:extLst>
               <a:ext uri="{FF2B5EF4-FFF2-40B4-BE49-F238E27FC236}">
                 <a16:creationId xmlns:a16="http://schemas.microsoft.com/office/drawing/2014/main" id="{946944FB-2D39-CAC2-A2D8-23790BDEBEE0}"/>
@@ -10166,276 +10055,6 @@
 
 <file path=ppt/slides/slide16.xml><?xml version="1.0" encoding="utf-8"?>
 <p:sld xmlns:a="http://schemas.openxmlformats.org/drawingml/2006/main" xmlns:r="http://schemas.openxmlformats.org/officeDocument/2006/relationships" xmlns:p="http://schemas.openxmlformats.org/presentationml/2006/main">
-  <p:cSld name="page16">
-    <p:spTree>
-      <p:nvGrpSpPr>
-        <p:cNvPr id="1" name=""/>
-        <p:cNvGrpSpPr/>
-        <p:nvPr/>
-      </p:nvGrpSpPr>
-      <p:grpSpPr>
-        <a:xfrm>
-          <a:off x="0" y="0"/>
-          <a:ext cx="0" cy="0"/>
-          <a:chOff x="0" y="0"/>
-          <a:chExt cx="0" cy="0"/>
-        </a:xfrm>
-      </p:grpSpPr>
-      <p:sp>
-        <p:nvSpPr>
-          <p:cNvPr id="2" name="Title 1">
-            <a:extLst>
-              <a:ext uri="{FF2B5EF4-FFF2-40B4-BE49-F238E27FC236}">
-                <a16:creationId xmlns:a16="http://schemas.microsoft.com/office/drawing/2014/main" id="{E07CA686-7B23-51B9-B44C-05580EA67C08}"/>
-              </a:ext>
-            </a:extLst>
-          </p:cNvPr>
-          <p:cNvSpPr txBox="1">
-            <a:spLocks noGrp="1"/>
-          </p:cNvSpPr>
-          <p:nvPr>
-            <p:ph type="title" idx="4294967295"/>
-          </p:nvPr>
-        </p:nvSpPr>
-        <p:spPr/>
-        <p:txBody>
-          <a:bodyPr vert="horz"/>
-          <a:lstStyle/>
-          <a:p>
-            <a:pPr lvl="0"/>
-            <a:r>
-              <a:rPr lang="en-US"/>
-              <a:t>Ravnoteža zračenja</a:t>
-            </a:r>
-          </a:p>
-        </p:txBody>
-      </p:sp>
-      <p:sp>
-        <p:nvSpPr>
-          <p:cNvPr id="3" name="Text Placeholder 2">
-            <a:extLst>
-              <a:ext uri="{FF2B5EF4-FFF2-40B4-BE49-F238E27FC236}">
-                <a16:creationId xmlns:a16="http://schemas.microsoft.com/office/drawing/2014/main" id="{CBFA71C1-3A13-7A87-5A91-1CC345E2EE09}"/>
-              </a:ext>
-            </a:extLst>
-          </p:cNvPr>
-          <p:cNvSpPr txBox="1">
-            <a:spLocks noGrp="1"/>
-          </p:cNvSpPr>
-          <p:nvPr>
-            <p:ph type="body" idx="4294967295"/>
-          </p:nvPr>
-        </p:nvSpPr>
-        <p:spPr/>
-        <p:txBody>
-          <a:bodyPr/>
-          <a:lstStyle/>
-          <a:p>
-            <a:pPr marL="285750" indent="-285750">
-              <a:spcBef>
-                <a:spcPts val="0"/>
-              </a:spcBef>
-              <a:spcAft>
-                <a:spcPts val="1582"/>
-              </a:spcAft>
-            </a:pPr>
-            <a:r>
-              <a:rPr lang="en-US" dirty="0" err="1"/>
-              <a:t>Drugi</a:t>
-            </a:r>
-            <a:r>
-              <a:rPr lang="en-US" dirty="0"/>
-              <a:t> </a:t>
-            </a:r>
-            <a:r>
-              <a:rPr lang="en-US" dirty="0" err="1"/>
-              <a:t>način</a:t>
-            </a:r>
-            <a:r>
-              <a:rPr lang="en-US" dirty="0"/>
-              <a:t> da </a:t>
-            </a:r>
-            <a:r>
-              <a:rPr lang="en-US" dirty="0" err="1"/>
-              <a:t>napišemo</a:t>
-            </a:r>
-            <a:r>
-              <a:rPr lang="en-US" dirty="0"/>
-              <a:t> da je </a:t>
-            </a:r>
-            <a:r>
-              <a:rPr lang="en-US" dirty="0" err="1"/>
-              <a:t>fluks</a:t>
-            </a:r>
-            <a:r>
-              <a:rPr lang="en-US" dirty="0"/>
-              <a:t> </a:t>
-            </a:r>
-            <a:r>
-              <a:rPr lang="en-US" dirty="0" err="1"/>
-              <a:t>konstantan</a:t>
-            </a:r>
-            <a:r>
-              <a:rPr lang="en-US" dirty="0"/>
-              <a:t> </a:t>
-            </a:r>
-            <a:r>
-              <a:rPr lang="en-US" dirty="0" err="1"/>
-              <a:t>sa</a:t>
-            </a:r>
-            <a:r>
-              <a:rPr lang="en-US" dirty="0"/>
-              <a:t> </a:t>
-            </a:r>
-            <a:r>
-              <a:rPr lang="en-US" dirty="0" err="1"/>
-              <a:t>dubinom</a:t>
-            </a:r>
-            <a:r>
-              <a:rPr lang="en-US" dirty="0"/>
-              <a:t>: </a:t>
-            </a:r>
-            <a:br>
-              <a:rPr lang="en-US" dirty="0"/>
-            </a:br>
-            <a:br>
-              <a:rPr lang="en-US" dirty="0"/>
-            </a:br>
-            <a:br>
-              <a:rPr lang="en-US" dirty="0"/>
-            </a:br>
-            <a:br>
-              <a:rPr lang="en-US" dirty="0"/>
-            </a:br>
-            <a:br>
-              <a:rPr lang="en-US" dirty="0"/>
-            </a:br>
-            <a:br>
-              <a:rPr lang="en-US" dirty="0"/>
-            </a:br>
-            <a:br>
-              <a:rPr lang="en-US" dirty="0"/>
-            </a:br>
-            <a:br>
-              <a:rPr lang="en-US" dirty="0"/>
-            </a:br>
-            <a:br>
-              <a:rPr lang="en-US" dirty="0"/>
-            </a:br>
-            <a:endParaRPr lang="en-US" dirty="0"/>
-          </a:p>
-          <a:p>
-            <a:pPr marL="285750" indent="-285750">
-              <a:spcBef>
-                <a:spcPts val="0"/>
-              </a:spcBef>
-              <a:spcAft>
-                <a:spcPts val="1582"/>
-              </a:spcAft>
-            </a:pPr>
-            <a:r>
-              <a:rPr lang="en-US" dirty="0" err="1"/>
-              <a:t>Šta</a:t>
-            </a:r>
-            <a:r>
-              <a:rPr lang="en-US" dirty="0"/>
-              <a:t> </a:t>
-            </a:r>
-            <a:r>
-              <a:rPr lang="en-US" dirty="0" err="1"/>
-              <a:t>smo</a:t>
-            </a:r>
-            <a:r>
-              <a:rPr lang="en-US" dirty="0"/>
-              <a:t> </a:t>
-            </a:r>
-            <a:r>
-              <a:rPr lang="en-US" dirty="0" err="1"/>
-              <a:t>ovde</a:t>
-            </a:r>
-            <a:r>
-              <a:rPr lang="en-US" dirty="0"/>
-              <a:t> </a:t>
-            </a:r>
-            <a:r>
-              <a:rPr lang="en-US" dirty="0" err="1"/>
-              <a:t>sve</a:t>
-            </a:r>
-            <a:r>
-              <a:rPr lang="en-US" dirty="0"/>
-              <a:t> </a:t>
-            </a:r>
-            <a:r>
-              <a:rPr lang="en-US" dirty="0" err="1"/>
-              <a:t>pretpostavili</a:t>
-            </a:r>
-            <a:r>
-              <a:rPr lang="en-US" dirty="0"/>
-              <a:t>? </a:t>
-            </a:r>
-            <a:r>
-              <a:rPr lang="en-US" b="1" dirty="0"/>
-              <a:t>(2-3 min </a:t>
-            </a:r>
-            <a:r>
-              <a:rPr lang="en-US" b="1" dirty="0" err="1"/>
-              <a:t>diskusija</a:t>
-            </a:r>
-            <a:r>
-              <a:rPr lang="en-US" b="1" dirty="0"/>
-              <a:t>)</a:t>
-            </a:r>
-          </a:p>
-        </p:txBody>
-      </p:sp>
-      <p:pic>
-        <p:nvPicPr>
-          <p:cNvPr id="4" name="">
-            <a:extLst>
-              <a:ext uri="{FF2B5EF4-FFF2-40B4-BE49-F238E27FC236}">
-                <a16:creationId xmlns:a16="http://schemas.microsoft.com/office/drawing/2014/main" id="{E6C981DB-7028-CC7A-C698-E0C7ABC03515}"/>
-              </a:ext>
-            </a:extLst>
-          </p:cNvPr>
-          <p:cNvPicPr>
-            <a:picLocks noChangeAspect="1"/>
-          </p:cNvPicPr>
-          <p:nvPr/>
-        </p:nvPicPr>
-        <p:blipFill>
-          <a:blip r:embed="rId3">
-            <a:lum/>
-            <a:alphaModFix/>
-          </a:blip>
-          <a:srcRect/>
-          <a:stretch>
-            <a:fillRect/>
-          </a:stretch>
-        </p:blipFill>
-        <p:spPr>
-          <a:xfrm>
-            <a:off x="2271600" y="1490760"/>
-            <a:ext cx="5533560" cy="1780920"/>
-          </a:xfrm>
-          <a:prstGeom prst="rect">
-            <a:avLst/>
-          </a:prstGeom>
-          <a:noFill/>
-          <a:ln>
-            <a:noFill/>
-          </a:ln>
-        </p:spPr>
-      </p:pic>
-    </p:spTree>
-  </p:cSld>
-  <p:clrMapOvr>
-    <a:masterClrMapping/>
-  </p:clrMapOvr>
-</p:sld>
-</file>
-
-<file path=ppt/slides/slide17.xml><?xml version="1.0" encoding="utf-8"?>
-<p:sld xmlns:a="http://schemas.openxmlformats.org/drawingml/2006/main" xmlns:r="http://schemas.openxmlformats.org/officeDocument/2006/relationships" xmlns:p="http://schemas.openxmlformats.org/presentationml/2006/main">
   <p:cSld name="page17">
     <p:spTree>
       <p:nvGrpSpPr>
@@ -10915,7 +10534,7 @@
 </p:sld>
 </file>
 
-<file path=ppt/slides/slide18.xml><?xml version="1.0" encoding="utf-8"?>
+<file path=ppt/slides/slide17.xml><?xml version="1.0" encoding="utf-8"?>
 <p:sld xmlns:a="http://schemas.openxmlformats.org/drawingml/2006/main" xmlns:r="http://schemas.openxmlformats.org/officeDocument/2006/relationships" xmlns:p="http://schemas.openxmlformats.org/presentationml/2006/main">
   <p:cSld name="page18">
     <p:spTree>
@@ -11187,7 +10806,7 @@
       </p:sp>
       <p:pic>
         <p:nvPicPr>
-          <p:cNvPr id="4" name="">
+          <p:cNvPr id="4" name="Picture 3">
             <a:extLst>
               <a:ext uri="{FF2B5EF4-FFF2-40B4-BE49-F238E27FC236}">
                 <a16:creationId xmlns:a16="http://schemas.microsoft.com/office/drawing/2014/main" id="{A739C3B7-A584-E00D-33C4-E15C2746A9BB}"/>
@@ -11652,7 +11271,7 @@
 </p:sld>
 </file>
 
-<file path=ppt/slides/slide19.xml><?xml version="1.0" encoding="utf-8"?>
+<file path=ppt/slides/slide18.xml><?xml version="1.0" encoding="utf-8"?>
 <p:sld xmlns:a="http://schemas.openxmlformats.org/drawingml/2006/main" xmlns:r="http://schemas.openxmlformats.org/officeDocument/2006/relationships" xmlns:p="http://schemas.openxmlformats.org/presentationml/2006/main">
   <p:cSld name="page19">
     <p:spTree>
@@ -11787,7 +11406,7 @@
       </p:sp>
       <p:pic>
         <p:nvPicPr>
-          <p:cNvPr id="4" name="">
+          <p:cNvPr id="4" name="Picture 3">
             <a:extLst>
               <a:ext uri="{FF2B5EF4-FFF2-40B4-BE49-F238E27FC236}">
                 <a16:creationId xmlns:a16="http://schemas.microsoft.com/office/drawing/2014/main" id="{AC1D1975-1790-E2CF-718E-36D3B2E5BCFA}"/>
@@ -12559,6 +12178,103 @@
 </p:sld>
 </file>
 
+<file path=ppt/slides/slide19.xml><?xml version="1.0" encoding="utf-8"?>
+<p:sld xmlns:a="http://schemas.openxmlformats.org/drawingml/2006/main" xmlns:r="http://schemas.openxmlformats.org/officeDocument/2006/relationships" xmlns:p="http://schemas.openxmlformats.org/presentationml/2006/main">
+  <p:cSld name="page20">
+    <p:spTree>
+      <p:nvGrpSpPr>
+        <p:cNvPr id="1" name=""/>
+        <p:cNvGrpSpPr/>
+        <p:nvPr/>
+      </p:nvGrpSpPr>
+      <p:grpSpPr>
+        <a:xfrm>
+          <a:off x="0" y="0"/>
+          <a:ext cx="0" cy="0"/>
+          <a:chOff x="0" y="0"/>
+          <a:chExt cx="0" cy="0"/>
+        </a:xfrm>
+      </p:grpSpPr>
+      <p:pic>
+        <p:nvPicPr>
+          <p:cNvPr id="2" name="Picture 1">
+            <a:extLst>
+              <a:ext uri="{FF2B5EF4-FFF2-40B4-BE49-F238E27FC236}">
+                <a16:creationId xmlns:a16="http://schemas.microsoft.com/office/drawing/2014/main" id="{FEF255A2-1CCA-2EFA-7591-6481155110BA}"/>
+              </a:ext>
+            </a:extLst>
+          </p:cNvPr>
+          <p:cNvPicPr>
+            <a:picLocks noChangeAspect="1"/>
+          </p:cNvPicPr>
+          <p:nvPr/>
+        </p:nvPicPr>
+        <p:blipFill>
+          <a:blip r:embed="rId3">
+            <a:lum/>
+            <a:alphaModFix/>
+          </a:blip>
+          <a:srcRect/>
+          <a:stretch>
+            <a:fillRect/>
+          </a:stretch>
+        </p:blipFill>
+        <p:spPr>
+          <a:xfrm>
+            <a:off x="1371599" y="427320"/>
+            <a:ext cx="7086600" cy="5241600"/>
+          </a:xfrm>
+          <a:prstGeom prst="rect">
+            <a:avLst/>
+          </a:prstGeom>
+          <a:noFill/>
+          <a:ln>
+            <a:noFill/>
+          </a:ln>
+        </p:spPr>
+      </p:pic>
+      <p:sp>
+        <p:nvSpPr>
+          <p:cNvPr id="3" name="Title 2">
+            <a:extLst>
+              <a:ext uri="{FF2B5EF4-FFF2-40B4-BE49-F238E27FC236}">
+                <a16:creationId xmlns:a16="http://schemas.microsoft.com/office/drawing/2014/main" id="{B273636C-487F-C3D8-5247-73C8D9D92912}"/>
+              </a:ext>
+            </a:extLst>
+          </p:cNvPr>
+          <p:cNvSpPr txBox="1">
+            <a:spLocks noGrp="1"/>
+          </p:cNvSpPr>
+          <p:nvPr>
+            <p:ph type="title" idx="4294967295"/>
+          </p:nvPr>
+        </p:nvSpPr>
+        <p:spPr>
+          <a:xfrm>
+            <a:off x="221400" y="-26280"/>
+            <a:ext cx="9675360" cy="603720"/>
+          </a:xfrm>
+        </p:spPr>
+        <p:txBody>
+          <a:bodyPr vert="horz"/>
+          <a:lstStyle/>
+          <a:p>
+            <a:pPr lvl="0"/>
+            <a:r>
+              <a:rPr lang="en-US"/>
+              <a:t>Ravnoteža zračenja u unutrašnjosti zvezde</a:t>
+            </a:r>
+          </a:p>
+        </p:txBody>
+      </p:sp>
+    </p:spTree>
+  </p:cSld>
+  <p:clrMapOvr>
+    <a:masterClrMapping/>
+  </p:clrMapOvr>
+</p:sld>
+</file>
+
 <file path=ppt/slides/slide2.xml><?xml version="1.0" encoding="utf-8"?>
 <p:sld xmlns:a="http://schemas.openxmlformats.org/drawingml/2006/main" xmlns:r="http://schemas.openxmlformats.org/officeDocument/2006/relationships" xmlns:p="http://schemas.openxmlformats.org/presentationml/2006/main">
   <p:cSld name="page2">
@@ -13132,7 +12848,7 @@
       </p:sp>
       <p:pic>
         <p:nvPicPr>
-          <p:cNvPr id="4" name="">
+          <p:cNvPr id="4" name="Picture 3">
             <a:extLst>
               <a:ext uri="{FF2B5EF4-FFF2-40B4-BE49-F238E27FC236}">
                 <a16:creationId xmlns:a16="http://schemas.microsoft.com/office/drawing/2014/main" id="{446BBFF1-77C4-DFA9-D387-F4C20731919F}"/>
@@ -13178,103 +12894,6 @@
 
 <file path=ppt/slides/slide20.xml><?xml version="1.0" encoding="utf-8"?>
 <p:sld xmlns:a="http://schemas.openxmlformats.org/drawingml/2006/main" xmlns:r="http://schemas.openxmlformats.org/officeDocument/2006/relationships" xmlns:p="http://schemas.openxmlformats.org/presentationml/2006/main">
-  <p:cSld name="page20">
-    <p:spTree>
-      <p:nvGrpSpPr>
-        <p:cNvPr id="1" name=""/>
-        <p:cNvGrpSpPr/>
-        <p:nvPr/>
-      </p:nvGrpSpPr>
-      <p:grpSpPr>
-        <a:xfrm>
-          <a:off x="0" y="0"/>
-          <a:ext cx="0" cy="0"/>
-          <a:chOff x="0" y="0"/>
-          <a:chExt cx="0" cy="0"/>
-        </a:xfrm>
-      </p:grpSpPr>
-      <p:pic>
-        <p:nvPicPr>
-          <p:cNvPr id="2" name="">
-            <a:extLst>
-              <a:ext uri="{FF2B5EF4-FFF2-40B4-BE49-F238E27FC236}">
-                <a16:creationId xmlns:a16="http://schemas.microsoft.com/office/drawing/2014/main" id="{FEF255A2-1CCA-2EFA-7591-6481155110BA}"/>
-              </a:ext>
-            </a:extLst>
-          </p:cNvPr>
-          <p:cNvPicPr>
-            <a:picLocks noChangeAspect="1"/>
-          </p:cNvPicPr>
-          <p:nvPr/>
-        </p:nvPicPr>
-        <p:blipFill>
-          <a:blip r:embed="rId3">
-            <a:lum/>
-            <a:alphaModFix/>
-          </a:blip>
-          <a:srcRect/>
-          <a:stretch>
-            <a:fillRect/>
-          </a:stretch>
-        </p:blipFill>
-        <p:spPr>
-          <a:xfrm>
-            <a:off x="1371599" y="427320"/>
-            <a:ext cx="7086600" cy="5241600"/>
-          </a:xfrm>
-          <a:prstGeom prst="rect">
-            <a:avLst/>
-          </a:prstGeom>
-          <a:noFill/>
-          <a:ln>
-            <a:noFill/>
-          </a:ln>
-        </p:spPr>
-      </p:pic>
-      <p:sp>
-        <p:nvSpPr>
-          <p:cNvPr id="3" name="Title 2">
-            <a:extLst>
-              <a:ext uri="{FF2B5EF4-FFF2-40B4-BE49-F238E27FC236}">
-                <a16:creationId xmlns:a16="http://schemas.microsoft.com/office/drawing/2014/main" id="{B273636C-487F-C3D8-5247-73C8D9D92912}"/>
-              </a:ext>
-            </a:extLst>
-          </p:cNvPr>
-          <p:cNvSpPr txBox="1">
-            <a:spLocks noGrp="1"/>
-          </p:cNvSpPr>
-          <p:nvPr>
-            <p:ph type="title" idx="4294967295"/>
-          </p:nvPr>
-        </p:nvSpPr>
-        <p:spPr>
-          <a:xfrm>
-            <a:off x="221400" y="-26280"/>
-            <a:ext cx="9675360" cy="603720"/>
-          </a:xfrm>
-        </p:spPr>
-        <p:txBody>
-          <a:bodyPr vert="horz"/>
-          <a:lstStyle/>
-          <a:p>
-            <a:pPr lvl="0"/>
-            <a:r>
-              <a:rPr lang="en-US"/>
-              <a:t>Ravnoteža zračenja u unutrašnjosti zvezde</a:t>
-            </a:r>
-          </a:p>
-        </p:txBody>
-      </p:sp>
-    </p:spTree>
-  </p:cSld>
-  <p:clrMapOvr>
-    <a:masterClrMapping/>
-  </p:clrMapOvr>
-</p:sld>
-</file>
-
-<file path=ppt/slides/slide21.xml><?xml version="1.0" encoding="utf-8"?>
-<p:sld xmlns:a="http://schemas.openxmlformats.org/drawingml/2006/main" xmlns:r="http://schemas.openxmlformats.org/officeDocument/2006/relationships" xmlns:p="http://schemas.openxmlformats.org/presentationml/2006/main">
   <p:cSld name="page21">
     <p:spTree>
       <p:nvGrpSpPr>
@@ -13572,7 +13191,7 @@
       </p:sp>
       <p:pic>
         <p:nvPicPr>
-          <p:cNvPr id="4" name="">
+          <p:cNvPr id="4" name="Picture 3">
             <a:extLst>
               <a:ext uri="{FF2B5EF4-FFF2-40B4-BE49-F238E27FC236}">
                 <a16:creationId xmlns:a16="http://schemas.microsoft.com/office/drawing/2014/main" id="{4AEF737B-4A9D-EB57-74D5-BEC2C218B6AC}"/>
@@ -13610,7 +13229,7 @@
       </p:pic>
       <p:pic>
         <p:nvPicPr>
-          <p:cNvPr id="5" name="">
+          <p:cNvPr id="5" name="Picture 4">
             <a:extLst>
               <a:ext uri="{FF2B5EF4-FFF2-40B4-BE49-F238E27FC236}">
                 <a16:creationId xmlns:a16="http://schemas.microsoft.com/office/drawing/2014/main" id="{DD410895-8F9B-25B8-EFAB-093C3AC6B166}"/>
@@ -13648,7 +13267,7 @@
       </p:pic>
       <p:pic>
         <p:nvPicPr>
-          <p:cNvPr id="6" name="">
+          <p:cNvPr id="6" name="Picture 5">
             <a:extLst>
               <a:ext uri="{FF2B5EF4-FFF2-40B4-BE49-F238E27FC236}">
                 <a16:creationId xmlns:a16="http://schemas.microsoft.com/office/drawing/2014/main" id="{3EE4428F-EF07-DA6A-761F-EAC93C8A7284}"/>
@@ -13692,7 +13311,7 @@
 </p:sld>
 </file>
 
-<file path=ppt/slides/slide22.xml><?xml version="1.0" encoding="utf-8"?>
+<file path=ppt/slides/slide21.xml><?xml version="1.0" encoding="utf-8"?>
 <p:sld xmlns:a="http://schemas.openxmlformats.org/drawingml/2006/main" xmlns:r="http://schemas.openxmlformats.org/officeDocument/2006/relationships" xmlns:p="http://schemas.openxmlformats.org/presentationml/2006/main">
   <p:cSld name="page22">
     <p:spTree>
@@ -13972,7 +13591,7 @@
       </p:sp>
       <p:pic>
         <p:nvPicPr>
-          <p:cNvPr id="4" name="">
+          <p:cNvPr id="4" name="Picture 3">
             <a:extLst>
               <a:ext uri="{FF2B5EF4-FFF2-40B4-BE49-F238E27FC236}">
                 <a16:creationId xmlns:a16="http://schemas.microsoft.com/office/drawing/2014/main" id="{7BE6E7AB-39A7-D291-19B9-C438CA1B333F}"/>
@@ -14013,7 +13632,7 @@
       </p:pic>
       <p:pic>
         <p:nvPicPr>
-          <p:cNvPr id="5" name="">
+          <p:cNvPr id="5" name="Picture 4">
             <a:extLst>
               <a:ext uri="{FF2B5EF4-FFF2-40B4-BE49-F238E27FC236}">
                 <a16:creationId xmlns:a16="http://schemas.microsoft.com/office/drawing/2014/main" id="{49690C39-A03D-B295-9E76-D2A9FACA95BB}"/>
@@ -14060,7 +13679,7 @@
 </p:sld>
 </file>
 
-<file path=ppt/slides/slide23.xml><?xml version="1.0" encoding="utf-8"?>
+<file path=ppt/slides/slide22.xml><?xml version="1.0" encoding="utf-8"?>
 <p:sld xmlns:a="http://schemas.openxmlformats.org/drawingml/2006/main" xmlns:r="http://schemas.openxmlformats.org/officeDocument/2006/relationships" xmlns:p="http://schemas.openxmlformats.org/presentationml/2006/main">
   <p:cSld name="page23">
     <p:spTree>
@@ -14601,7 +14220,7 @@
       </p:sp>
       <p:pic>
         <p:nvPicPr>
-          <p:cNvPr id="4" name="">
+          <p:cNvPr id="4" name="Picture 3">
             <a:extLst>
               <a:ext uri="{FF2B5EF4-FFF2-40B4-BE49-F238E27FC236}">
                 <a16:creationId xmlns:a16="http://schemas.microsoft.com/office/drawing/2014/main" id="{AD211EA5-A003-8BAD-2C30-359E701EF352}"/>
@@ -14642,7 +14261,7 @@
       </p:pic>
       <p:pic>
         <p:nvPicPr>
-          <p:cNvPr id="5" name="">
+          <p:cNvPr id="5" name="Picture 4">
             <a:extLst>
               <a:ext uri="{FF2B5EF4-FFF2-40B4-BE49-F238E27FC236}">
                 <a16:creationId xmlns:a16="http://schemas.microsoft.com/office/drawing/2014/main" id="{02D97339-CAB0-56D5-4E6A-CB5E603C5139}"/>
@@ -14689,7 +14308,7 @@
 </p:sld>
 </file>
 
-<file path=ppt/slides/slide24.xml><?xml version="1.0" encoding="utf-8"?>
+<file path=ppt/slides/slide23.xml><?xml version="1.0" encoding="utf-8"?>
 <p:sld xmlns:a="http://schemas.openxmlformats.org/drawingml/2006/main" xmlns:r="http://schemas.openxmlformats.org/officeDocument/2006/relationships" xmlns:p="http://schemas.openxmlformats.org/presentationml/2006/main">
   <p:cSld name="page24">
     <p:spTree>
@@ -15113,7 +14732,7 @@
       </p:sp>
       <p:pic>
         <p:nvPicPr>
-          <p:cNvPr id="4" name="">
+          <p:cNvPr id="4" name="Picture 3">
             <a:extLst>
               <a:ext uri="{FF2B5EF4-FFF2-40B4-BE49-F238E27FC236}">
                 <a16:creationId xmlns:a16="http://schemas.microsoft.com/office/drawing/2014/main" id="{DEF70306-BD69-1463-0527-D3484DBCA9BB}"/>
@@ -15154,7 +14773,7 @@
       </p:pic>
       <p:pic>
         <p:nvPicPr>
-          <p:cNvPr id="5" name="">
+          <p:cNvPr id="5" name="Picture 4">
             <a:extLst>
               <a:ext uri="{FF2B5EF4-FFF2-40B4-BE49-F238E27FC236}">
                 <a16:creationId xmlns:a16="http://schemas.microsoft.com/office/drawing/2014/main" id="{70BCA704-BD0B-68C0-7B76-4AECAEB72BB5}"/>
@@ -15198,7 +14817,7 @@
 </p:sld>
 </file>
 
-<file path=ppt/slides/slide25.xml><?xml version="1.0" encoding="utf-8"?>
+<file path=ppt/slides/slide24.xml><?xml version="1.0" encoding="utf-8"?>
 <p:sld xmlns:a="http://schemas.openxmlformats.org/drawingml/2006/main" xmlns:r="http://schemas.openxmlformats.org/officeDocument/2006/relationships" xmlns:p="http://schemas.openxmlformats.org/presentationml/2006/main">
   <p:cSld name="page25">
     <p:spTree>
@@ -15400,7 +15019,7 @@
       </p:sp>
       <p:pic>
         <p:nvPicPr>
-          <p:cNvPr id="4" name="">
+          <p:cNvPr id="4" name="Picture 3">
             <a:extLst>
               <a:ext uri="{FF2B5EF4-FFF2-40B4-BE49-F238E27FC236}">
                 <a16:creationId xmlns:a16="http://schemas.microsoft.com/office/drawing/2014/main" id="{CAB48A54-19CC-BD7A-39EB-99DEE5A174B7}"/>
@@ -15669,7 +15288,7 @@
 </p:sld>
 </file>
 
-<file path=ppt/slides/slide26.xml><?xml version="1.0" encoding="utf-8"?>
+<file path=ppt/slides/slide25.xml><?xml version="1.0" encoding="utf-8"?>
 <p:sld xmlns:a="http://schemas.openxmlformats.org/drawingml/2006/main" xmlns:r="http://schemas.openxmlformats.org/officeDocument/2006/relationships" xmlns:p="http://schemas.openxmlformats.org/presentationml/2006/main">
   <p:cSld name="page26">
     <p:spTree>
@@ -15717,7 +15336,7 @@
       </p:sp>
       <p:pic>
         <p:nvPicPr>
-          <p:cNvPr id="3" name="">
+          <p:cNvPr id="3" name="Picture 2">
             <a:extLst>
               <a:ext uri="{FF2B5EF4-FFF2-40B4-BE49-F238E27FC236}">
                 <a16:creationId xmlns:a16="http://schemas.microsoft.com/office/drawing/2014/main" id="{BB0ABF6F-8057-7D65-257B-7E32A004C304}"/>
@@ -15761,7 +15380,7 @@
 </p:sld>
 </file>
 
-<file path=ppt/slides/slide27.xml><?xml version="1.0" encoding="utf-8"?>
+<file path=ppt/slides/slide26.xml><?xml version="1.0" encoding="utf-8"?>
 <p:sld xmlns:a="http://schemas.openxmlformats.org/drawingml/2006/main" xmlns:r="http://schemas.openxmlformats.org/officeDocument/2006/relationships" xmlns:p="http://schemas.openxmlformats.org/presentationml/2006/main">
   <p:cSld name="page27">
     <p:spTree>
@@ -16328,7 +15947,7 @@
       </p:sp>
       <p:pic>
         <p:nvPicPr>
-          <p:cNvPr id="4" name="">
+          <p:cNvPr id="4" name="Picture 3">
             <a:extLst>
               <a:ext uri="{FF2B5EF4-FFF2-40B4-BE49-F238E27FC236}">
                 <a16:creationId xmlns:a16="http://schemas.microsoft.com/office/drawing/2014/main" id="{30DF9732-901D-FC67-1F64-2A3819B0B560}"/>
@@ -16369,7 +15988,7 @@
       </p:pic>
       <p:pic>
         <p:nvPicPr>
-          <p:cNvPr id="5" name="">
+          <p:cNvPr id="5" name="Picture 4">
             <a:extLst>
               <a:ext uri="{FF2B5EF4-FFF2-40B4-BE49-F238E27FC236}">
                 <a16:creationId xmlns:a16="http://schemas.microsoft.com/office/drawing/2014/main" id="{9265A4B6-57CB-16A6-B610-E2AC420083A8}"/>
@@ -16416,7 +16035,7 @@
 </p:sld>
 </file>
 
-<file path=ppt/slides/slide28.xml><?xml version="1.0" encoding="utf-8"?>
+<file path=ppt/slides/slide27.xml><?xml version="1.0" encoding="utf-8"?>
 <p:sld xmlns:a="http://schemas.openxmlformats.org/drawingml/2006/main" xmlns:r="http://schemas.openxmlformats.org/officeDocument/2006/relationships" xmlns:p="http://schemas.openxmlformats.org/presentationml/2006/main">
   <p:cSld name="page28">
     <p:spTree>
@@ -16710,7 +16329,7 @@
       </p:sp>
       <p:pic>
         <p:nvPicPr>
-          <p:cNvPr id="4" name="">
+          <p:cNvPr id="4" name="Picture 3">
             <a:extLst>
               <a:ext uri="{FF2B5EF4-FFF2-40B4-BE49-F238E27FC236}">
                 <a16:creationId xmlns:a16="http://schemas.microsoft.com/office/drawing/2014/main" id="{6F77B31E-1327-14A8-670B-75D6C5A3D380}"/>
@@ -17010,7 +16629,7 @@
       </p:sp>
       <p:pic>
         <p:nvPicPr>
-          <p:cNvPr id="4" name="">
+          <p:cNvPr id="4" name="Picture 3">
             <a:extLst>
               <a:ext uri="{FF2B5EF4-FFF2-40B4-BE49-F238E27FC236}">
                 <a16:creationId xmlns:a16="http://schemas.microsoft.com/office/drawing/2014/main" id="{1E3F90D7-61A7-F210-EF91-A917B44C5709}"/>
@@ -17104,7 +16723,7 @@
       </p:sp>
       <p:pic>
         <p:nvPicPr>
-          <p:cNvPr id="3" name="">
+          <p:cNvPr id="3" name="Picture 2">
             <a:extLst>
               <a:ext uri="{FF2B5EF4-FFF2-40B4-BE49-F238E27FC236}">
                 <a16:creationId xmlns:a16="http://schemas.microsoft.com/office/drawing/2014/main" id="{0218880D-2308-A42E-3D31-DB8D27BF75DC}"/>
@@ -17737,7 +17356,7 @@
       </p:sp>
       <p:pic>
         <p:nvPicPr>
-          <p:cNvPr id="4" name="">
+          <p:cNvPr id="4" name="Picture 3">
             <a:extLst>
               <a:ext uri="{FF2B5EF4-FFF2-40B4-BE49-F238E27FC236}">
                 <a16:creationId xmlns:a16="http://schemas.microsoft.com/office/drawing/2014/main" id="{44741348-773A-819E-8D29-09BB59532477}"/>
@@ -17775,7 +17394,7 @@
       </p:pic>
       <p:pic>
         <p:nvPicPr>
-          <p:cNvPr id="5" name="">
+          <p:cNvPr id="5" name="Picture 4">
             <a:extLst>
               <a:ext uri="{FF2B5EF4-FFF2-40B4-BE49-F238E27FC236}">
                 <a16:creationId xmlns:a16="http://schemas.microsoft.com/office/drawing/2014/main" id="{31DFC8DA-9B3E-68F3-89CE-A04820BBC5F5}"/>
@@ -18370,7 +17989,7 @@
       </p:sp>
       <p:pic>
         <p:nvPicPr>
-          <p:cNvPr id="4" name="">
+          <p:cNvPr id="4" name="Picture 3">
             <a:extLst>
               <a:ext uri="{FF2B5EF4-FFF2-40B4-BE49-F238E27FC236}">
                 <a16:creationId xmlns:a16="http://schemas.microsoft.com/office/drawing/2014/main" id="{56A89CE9-DEC6-8374-F06E-26BA13780CA2}"/>
@@ -18685,7 +18304,7 @@
       </p:sp>
       <p:pic>
         <p:nvPicPr>
-          <p:cNvPr id="3" name="">
+          <p:cNvPr id="3" name="Picture 2">
             <a:extLst>
               <a:ext uri="{FF2B5EF4-FFF2-40B4-BE49-F238E27FC236}">
                 <a16:creationId xmlns:a16="http://schemas.microsoft.com/office/drawing/2014/main" id="{8B02B154-A011-773E-09F0-B0D8F9C84B8F}"/>
@@ -18726,7 +18345,7 @@
       </p:pic>
       <p:pic>
         <p:nvPicPr>
-          <p:cNvPr id="4" name="">
+          <p:cNvPr id="4" name="Picture 3">
             <a:extLst>
               <a:ext uri="{FF2B5EF4-FFF2-40B4-BE49-F238E27FC236}">
                 <a16:creationId xmlns:a16="http://schemas.microsoft.com/office/drawing/2014/main" id="{FF3391C9-8440-B0C6-065B-043ACEC1D806}"/>
@@ -18764,7 +18383,7 @@
       </p:pic>
       <p:pic>
         <p:nvPicPr>
-          <p:cNvPr id="5" name="">
+          <p:cNvPr id="5" name="Picture 4">
             <a:extLst>
               <a:ext uri="{FF2B5EF4-FFF2-40B4-BE49-F238E27FC236}">
                 <a16:creationId xmlns:a16="http://schemas.microsoft.com/office/drawing/2014/main" id="{B33DC676-3340-0C96-3A30-3D2C5850F9C7}"/>
@@ -19281,7 +18900,7 @@
       </p:sp>
       <p:pic>
         <p:nvPicPr>
-          <p:cNvPr id="4" name="">
+          <p:cNvPr id="4" name="Picture 3">
             <a:extLst>
               <a:ext uri="{FF2B5EF4-FFF2-40B4-BE49-F238E27FC236}">
                 <a16:creationId xmlns:a16="http://schemas.microsoft.com/office/drawing/2014/main" id="{BC3A59BE-D3CA-3F4F-0AC2-56A2EEEB23A6}"/>
@@ -19319,7 +18938,7 @@
       </p:pic>
       <p:pic>
         <p:nvPicPr>
-          <p:cNvPr id="5" name="">
+          <p:cNvPr id="5" name="Picture 4">
             <a:extLst>
               <a:ext uri="{FF2B5EF4-FFF2-40B4-BE49-F238E27FC236}">
                 <a16:creationId xmlns:a16="http://schemas.microsoft.com/office/drawing/2014/main" id="{EF6B6B0B-444F-6A9F-E3E9-D9F40AE8D8BC}"/>
@@ -19519,7 +19138,7 @@
       </p:sp>
       <p:pic>
         <p:nvPicPr>
-          <p:cNvPr id="4" name="">
+          <p:cNvPr id="4" name="Picture 3">
             <a:extLst>
               <a:ext uri="{FF2B5EF4-FFF2-40B4-BE49-F238E27FC236}">
                 <a16:creationId xmlns:a16="http://schemas.microsoft.com/office/drawing/2014/main" id="{392953AA-E575-91E9-5DB3-C13B9E75B325}"/>
